--- a/מצגת1.pptx
+++ b/מצגת1.pptx
@@ -11,6 +11,8 @@
     <p:sldId id="262" r:id="rId5"/>
     <p:sldId id="263" r:id="rId6"/>
     <p:sldId id="264" r:id="rId7"/>
+    <p:sldId id="265" r:id="rId8"/>
+    <p:sldId id="266" r:id="rId9"/>
   </p:sldIdLst>
   <p:sldSz cx="12192000" cy="6858000"/>
   <p:notesSz cx="6858000" cy="9144000"/>
@@ -256,7 +258,7 @@
           <a:p>
             <a:fld id="{E6FDE148-75AC-4426-A12C-73C0831FD3F5}" type="datetimeFigureOut">
               <a:rPr lang="he-IL" smtClean="0"/>
-              <a:t>ט"ו/סיון/תשפ"ו</a:t>
+              <a:t>י"ט/סיון/תשפ"ו</a:t>
             </a:fld>
             <a:endParaRPr lang="he-IL"/>
           </a:p>
@@ -467,7 +469,7 @@
           <a:p>
             <a:fld id="{E6FDE148-75AC-4426-A12C-73C0831FD3F5}" type="datetimeFigureOut">
               <a:rPr lang="he-IL" smtClean="0"/>
-              <a:t>ט"ו/סיון/תשפ"ו</a:t>
+              <a:t>י"ט/סיון/תשפ"ו</a:t>
             </a:fld>
             <a:endParaRPr lang="he-IL"/>
           </a:p>
@@ -682,7 +684,7 @@
           <a:p>
             <a:fld id="{E6FDE148-75AC-4426-A12C-73C0831FD3F5}" type="datetimeFigureOut">
               <a:rPr lang="he-IL" smtClean="0"/>
-              <a:t>ט"ו/סיון/תשפ"ו</a:t>
+              <a:t>י"ט/סיון/תשפ"ו</a:t>
             </a:fld>
             <a:endParaRPr lang="he-IL"/>
           </a:p>
@@ -883,7 +885,7 @@
           <a:p>
             <a:fld id="{E6FDE148-75AC-4426-A12C-73C0831FD3F5}" type="datetimeFigureOut">
               <a:rPr lang="he-IL" smtClean="0"/>
-              <a:t>ט"ו/סיון/תשפ"ו</a:t>
+              <a:t>י"ט/סיון/תשפ"ו</a:t>
             </a:fld>
             <a:endParaRPr lang="he-IL"/>
           </a:p>
@@ -1162,7 +1164,7 @@
           <a:p>
             <a:fld id="{E6FDE148-75AC-4426-A12C-73C0831FD3F5}" type="datetimeFigureOut">
               <a:rPr lang="he-IL" smtClean="0"/>
-              <a:t>ט"ו/סיון/תשפ"ו</a:t>
+              <a:t>י"ט/סיון/תשפ"ו</a:t>
             </a:fld>
             <a:endParaRPr lang="he-IL"/>
           </a:p>
@@ -1430,7 +1432,7 @@
           <a:p>
             <a:fld id="{E6FDE148-75AC-4426-A12C-73C0831FD3F5}" type="datetimeFigureOut">
               <a:rPr lang="he-IL" smtClean="0"/>
-              <a:t>ט"ו/סיון/תשפ"ו</a:t>
+              <a:t>י"ט/סיון/תשפ"ו</a:t>
             </a:fld>
             <a:endParaRPr lang="he-IL"/>
           </a:p>
@@ -1846,7 +1848,7 @@
           <a:p>
             <a:fld id="{E6FDE148-75AC-4426-A12C-73C0831FD3F5}" type="datetimeFigureOut">
               <a:rPr lang="he-IL" smtClean="0"/>
-              <a:t>ט"ו/סיון/תשפ"ו</a:t>
+              <a:t>י"ט/סיון/תשפ"ו</a:t>
             </a:fld>
             <a:endParaRPr lang="he-IL"/>
           </a:p>
@@ -1995,7 +1997,7 @@
           <a:p>
             <a:fld id="{E6FDE148-75AC-4426-A12C-73C0831FD3F5}" type="datetimeFigureOut">
               <a:rPr lang="he-IL" smtClean="0"/>
-              <a:t>ט"ו/סיון/תשפ"ו</a:t>
+              <a:t>י"ט/סיון/תשפ"ו</a:t>
             </a:fld>
             <a:endParaRPr lang="he-IL"/>
           </a:p>
@@ -2121,7 +2123,7 @@
           <a:p>
             <a:fld id="{E6FDE148-75AC-4426-A12C-73C0831FD3F5}" type="datetimeFigureOut">
               <a:rPr lang="he-IL" smtClean="0"/>
-              <a:t>ט"ו/סיון/תשפ"ו</a:t>
+              <a:t>י"ט/סיון/תשפ"ו</a:t>
             </a:fld>
             <a:endParaRPr lang="he-IL"/>
           </a:p>
@@ -2372,7 +2374,7 @@
           <a:p>
             <a:fld id="{E6FDE148-75AC-4426-A12C-73C0831FD3F5}" type="datetimeFigureOut">
               <a:rPr lang="he-IL" smtClean="0"/>
-              <a:t>ט"ו/סיון/תשפ"ו</a:t>
+              <a:t>י"ט/סיון/תשפ"ו</a:t>
             </a:fld>
             <a:endParaRPr lang="he-IL"/>
           </a:p>
@@ -2817,7 +2819,7 @@
           <a:p>
             <a:fld id="{E6FDE148-75AC-4426-A12C-73C0831FD3F5}" type="datetimeFigureOut">
               <a:rPr lang="he-IL" smtClean="0"/>
-              <a:t>ט"ו/סיון/תשפ"ו</a:t>
+              <a:t>י"ט/סיון/תשפ"ו</a:t>
             </a:fld>
             <a:endParaRPr lang="he-IL"/>
           </a:p>
@@ -3151,7 +3153,7 @@
           <a:p>
             <a:fld id="{E6FDE148-75AC-4426-A12C-73C0831FD3F5}" type="datetimeFigureOut">
               <a:rPr lang="he-IL" smtClean="0"/>
-              <a:t>ט"ו/סיון/תשפ"ו</a:t>
+              <a:t>י"ט/סיון/תשפ"ו</a:t>
             </a:fld>
             <a:endParaRPr lang="he-IL"/>
           </a:p>
@@ -4169,6 +4171,10 @@
           <a:p>
             <a:pPr algn="r"/>
             <a:r>
+              <a:rPr lang="en-US" dirty="0"/>
+              <a:t>  </a:t>
+            </a:r>
+            <a:r>
               <a:rPr lang="he-IL" dirty="0"/>
               <a:t>עדיפות האדם- לפי מספר האנשים בתמונה.</a:t>
             </a:r>
@@ -4224,8 +4230,8 @@
         </p:blipFill>
         <p:spPr>
           <a:xfrm>
-            <a:off x="598721" y="3544530"/>
-            <a:ext cx="3864077" cy="2576051"/>
+            <a:off x="598722" y="3544574"/>
+            <a:ext cx="3864012" cy="2576008"/>
           </a:xfrm>
           <a:prstGeom prst="rect">
             <a:avLst/>
@@ -4317,8 +4323,8 @@
         </p:nvSpPr>
         <p:spPr>
           <a:xfrm>
-            <a:off x="7098827" y="1504335"/>
-            <a:ext cx="2156423" cy="923330"/>
+            <a:off x="7489790" y="2310581"/>
+            <a:ext cx="3446777" cy="1200329"/>
           </a:xfrm>
           <a:prstGeom prst="rect">
             <a:avLst/>
@@ -4347,12 +4353,20 @@
           <a:p>
             <a:pPr algn="r"/>
             <a:r>
-              <a:rPr lang="he-IL"/>
-              <a:t>. </a:t>
-            </a:r>
-            <a:r>
-              <a:rPr lang="en-US"/>
-              <a:t>2</a:t>
+              <a:rPr lang="he-IL" dirty="0"/>
+              <a:t>2. ניתוח התמונה- על מנת לתת ציון. </a:t>
+            </a:r>
+            <a:endParaRPr lang="en-US" dirty="0"/>
+          </a:p>
+          <a:p>
+            <a:pPr algn="r"/>
+            <a:r>
+              <a:rPr lang="he-IL" dirty="0"/>
+              <a:t>. בחירת התמונה האידיאלית. </a:t>
+            </a:r>
+            <a:r>
+              <a:rPr lang="en-US" dirty="0"/>
+              <a:t>3</a:t>
             </a:r>
             <a:endParaRPr lang="he-IL" dirty="0"/>
           </a:p>
@@ -4429,10 +4443,269 @@
           </a:p>
         </p:txBody>
       </p:sp>
+      <p:sp>
+        <p:nvSpPr>
+          <p:cNvPr id="5" name="תיבת טקסט 4">
+            <a:extLst>
+              <a:ext uri="{FF2B5EF4-FFF2-40B4-BE49-F238E27FC236}">
+                <a16:creationId xmlns:a16="http://schemas.microsoft.com/office/drawing/2014/main" id="{EAD7D697-C27C-C66B-4DF2-F372091FB305}"/>
+              </a:ext>
+            </a:extLst>
+          </p:cNvPr>
+          <p:cNvSpPr txBox="1"/>
+          <p:nvPr/>
+        </p:nvSpPr>
+        <p:spPr>
+          <a:xfrm>
+            <a:off x="6449961" y="1968288"/>
+            <a:ext cx="3625645" cy="861774"/>
+          </a:xfrm>
+          <a:prstGeom prst="rect">
+            <a:avLst/>
+          </a:prstGeom>
+          <a:noFill/>
+        </p:spPr>
+        <p:txBody>
+          <a:bodyPr wrap="square">
+            <a:spAutoFit/>
+          </a:bodyPr>
+          <a:lstStyle/>
+          <a:p>
+            <a:pPr algn="r"/>
+            <a:r>
+              <a:rPr lang="he-IL" sz="3200" dirty="0"/>
+              <a:t>1. חלוקה לפוזות.  </a:t>
+            </a:r>
+          </a:p>
+          <a:p>
+            <a:pPr algn="r"/>
+            <a:endParaRPr lang="he-IL" dirty="0"/>
+          </a:p>
+        </p:txBody>
+      </p:sp>
     </p:spTree>
     <p:extLst>
       <p:ext uri="{BB962C8B-B14F-4D97-AF65-F5344CB8AC3E}">
         <p14:creationId xmlns:p14="http://schemas.microsoft.com/office/powerpoint/2010/main" val="3249356772"/>
+      </p:ext>
+    </p:extLst>
+  </p:cSld>
+  <p:clrMapOvr>
+    <a:masterClrMapping/>
+  </p:clrMapOvr>
+</p:sld>
+</file>
+
+<file path=ppt/slides/slide7.xml><?xml version="1.0" encoding="utf-8"?>
+<p:sld xmlns:a="http://schemas.openxmlformats.org/drawingml/2006/main" xmlns:r="http://schemas.openxmlformats.org/officeDocument/2006/relationships" xmlns:p="http://schemas.openxmlformats.org/presentationml/2006/main">
+  <p:cSld>
+    <p:spTree>
+      <p:nvGrpSpPr>
+        <p:cNvPr id="1" name="">
+          <a:extLst>
+            <a:ext uri="{FF2B5EF4-FFF2-40B4-BE49-F238E27FC236}">
+              <a16:creationId xmlns:a16="http://schemas.microsoft.com/office/drawing/2014/main" id="{876B16CD-190A-EFA3-F3E6-BBE00B1F677D}"/>
+            </a:ext>
+          </a:extLst>
+        </p:cNvPr>
+        <p:cNvGrpSpPr/>
+        <p:nvPr/>
+      </p:nvGrpSpPr>
+      <p:grpSpPr>
+        <a:xfrm>
+          <a:off x="0" y="0"/>
+          <a:ext cx="0" cy="0"/>
+          <a:chOff x="0" y="0"/>
+          <a:chExt cx="0" cy="0"/>
+        </a:xfrm>
+      </p:grpSpPr>
+      <p:sp>
+        <p:nvSpPr>
+          <p:cNvPr id="2" name="תיבת טקסט 1">
+            <a:extLst>
+              <a:ext uri="{FF2B5EF4-FFF2-40B4-BE49-F238E27FC236}">
+                <a16:creationId xmlns:a16="http://schemas.microsoft.com/office/drawing/2014/main" id="{3860C3AB-ED18-A7F5-E0E7-56691DAFE0C3}"/>
+              </a:ext>
+            </a:extLst>
+          </p:cNvPr>
+          <p:cNvSpPr txBox="1"/>
+          <p:nvPr/>
+        </p:nvSpPr>
+        <p:spPr>
+          <a:xfrm>
+            <a:off x="11248103" y="196644"/>
+            <a:ext cx="641522" cy="369332"/>
+          </a:xfrm>
+          <a:prstGeom prst="rect">
+            <a:avLst/>
+          </a:prstGeom>
+          <a:noFill/>
+        </p:spPr>
+        <p:txBody>
+          <a:bodyPr wrap="none" rtlCol="1">
+            <a:spAutoFit/>
+          </a:bodyPr>
+          <a:lstStyle/>
+          <a:p>
+            <a:r>
+              <a:rPr lang="he-IL" dirty="0"/>
+              <a:t>בס"ד</a:t>
+            </a:r>
+          </a:p>
+        </p:txBody>
+      </p:sp>
+      <p:sp>
+        <p:nvSpPr>
+          <p:cNvPr id="4" name="תיבת טקסט 3">
+            <a:extLst>
+              <a:ext uri="{FF2B5EF4-FFF2-40B4-BE49-F238E27FC236}">
+                <a16:creationId xmlns:a16="http://schemas.microsoft.com/office/drawing/2014/main" id="{C40C5E4B-2872-629F-EE59-891FAE8FB0AE}"/>
+              </a:ext>
+            </a:extLst>
+          </p:cNvPr>
+          <p:cNvSpPr txBox="1"/>
+          <p:nvPr/>
+        </p:nvSpPr>
+        <p:spPr>
+          <a:xfrm>
+            <a:off x="4227869" y="2922017"/>
+            <a:ext cx="5732207" cy="584775"/>
+          </a:xfrm>
+          <a:prstGeom prst="rect">
+            <a:avLst/>
+          </a:prstGeom>
+          <a:noFill/>
+        </p:spPr>
+        <p:txBody>
+          <a:bodyPr wrap="square">
+            <a:spAutoFit/>
+          </a:bodyPr>
+          <a:lstStyle/>
+          <a:p>
+            <a:pPr algn="r"/>
+            <a:r>
+              <a:rPr lang="he-IL" sz="3200" dirty="0"/>
+              <a:t> ניתוח התמונה- על מנת לתת ציון.</a:t>
+            </a:r>
+          </a:p>
+        </p:txBody>
+      </p:sp>
+    </p:spTree>
+    <p:extLst>
+      <p:ext uri="{BB962C8B-B14F-4D97-AF65-F5344CB8AC3E}">
+        <p14:creationId xmlns:p14="http://schemas.microsoft.com/office/powerpoint/2010/main" val="1013562850"/>
+      </p:ext>
+    </p:extLst>
+  </p:cSld>
+  <p:clrMapOvr>
+    <a:masterClrMapping/>
+  </p:clrMapOvr>
+</p:sld>
+</file>
+
+<file path=ppt/slides/slide8.xml><?xml version="1.0" encoding="utf-8"?>
+<p:sld xmlns:a="http://schemas.openxmlformats.org/drawingml/2006/main" xmlns:r="http://schemas.openxmlformats.org/officeDocument/2006/relationships" xmlns:p="http://schemas.openxmlformats.org/presentationml/2006/main">
+  <p:cSld>
+    <p:spTree>
+      <p:nvGrpSpPr>
+        <p:cNvPr id="1" name="">
+          <a:extLst>
+            <a:ext uri="{FF2B5EF4-FFF2-40B4-BE49-F238E27FC236}">
+              <a16:creationId xmlns:a16="http://schemas.microsoft.com/office/drawing/2014/main" id="{7A0445DA-65AD-78BD-5000-242056C2D00C}"/>
+            </a:ext>
+          </a:extLst>
+        </p:cNvPr>
+        <p:cNvGrpSpPr/>
+        <p:nvPr/>
+      </p:nvGrpSpPr>
+      <p:grpSpPr>
+        <a:xfrm>
+          <a:off x="0" y="0"/>
+          <a:ext cx="0" cy="0"/>
+          <a:chOff x="0" y="0"/>
+          <a:chExt cx="0" cy="0"/>
+        </a:xfrm>
+      </p:grpSpPr>
+      <p:sp>
+        <p:nvSpPr>
+          <p:cNvPr id="2" name="תיבת טקסט 1">
+            <a:extLst>
+              <a:ext uri="{FF2B5EF4-FFF2-40B4-BE49-F238E27FC236}">
+                <a16:creationId xmlns:a16="http://schemas.microsoft.com/office/drawing/2014/main" id="{9E401B13-9D76-DFFF-E287-6720642BD7AC}"/>
+              </a:ext>
+            </a:extLst>
+          </p:cNvPr>
+          <p:cNvSpPr txBox="1"/>
+          <p:nvPr/>
+        </p:nvSpPr>
+        <p:spPr>
+          <a:xfrm>
+            <a:off x="11248103" y="196644"/>
+            <a:ext cx="641522" cy="369332"/>
+          </a:xfrm>
+          <a:prstGeom prst="rect">
+            <a:avLst/>
+          </a:prstGeom>
+          <a:noFill/>
+        </p:spPr>
+        <p:txBody>
+          <a:bodyPr wrap="none" rtlCol="1">
+            <a:spAutoFit/>
+          </a:bodyPr>
+          <a:lstStyle/>
+          <a:p>
+            <a:r>
+              <a:rPr lang="he-IL" dirty="0"/>
+              <a:t>בס"ד</a:t>
+            </a:r>
+          </a:p>
+        </p:txBody>
+      </p:sp>
+      <p:sp>
+        <p:nvSpPr>
+          <p:cNvPr id="4" name="תיבת טקסט 3">
+            <a:extLst>
+              <a:ext uri="{FF2B5EF4-FFF2-40B4-BE49-F238E27FC236}">
+                <a16:creationId xmlns:a16="http://schemas.microsoft.com/office/drawing/2014/main" id="{AB185A2A-BDCB-402D-C8FF-4C3EB7A2B6E9}"/>
+              </a:ext>
+            </a:extLst>
+          </p:cNvPr>
+          <p:cNvSpPr txBox="1"/>
+          <p:nvPr/>
+        </p:nvSpPr>
+        <p:spPr>
+          <a:xfrm>
+            <a:off x="4633451" y="2844225"/>
+            <a:ext cx="6100916" cy="584775"/>
+          </a:xfrm>
+          <a:prstGeom prst="rect">
+            <a:avLst/>
+          </a:prstGeom>
+          <a:noFill/>
+        </p:spPr>
+        <p:txBody>
+          <a:bodyPr wrap="square">
+            <a:spAutoFit/>
+          </a:bodyPr>
+          <a:lstStyle/>
+          <a:p>
+            <a:pPr algn="r"/>
+            <a:r>
+              <a:rPr lang="he-IL" sz="3200" dirty="0"/>
+              <a:t>. בחירת התמונה האידיאלית. </a:t>
+            </a:r>
+            <a:r>
+              <a:rPr lang="en-US" sz="3200" dirty="0"/>
+              <a:t>3</a:t>
+            </a:r>
+            <a:endParaRPr lang="he-IL" sz="3200" dirty="0"/>
+          </a:p>
+        </p:txBody>
+      </p:sp>
+    </p:spTree>
+    <p:extLst>
+      <p:ext uri="{BB962C8B-B14F-4D97-AF65-F5344CB8AC3E}">
+        <p14:creationId xmlns:p14="http://schemas.microsoft.com/office/powerpoint/2010/main" val="2202461877"/>
       </p:ext>
     </p:extLst>
   </p:cSld>

--- a/מצגת1.pptx
+++ b/מצגת1.pptx
@@ -258,7 +258,7 @@
           <a:p>
             <a:fld id="{E6FDE148-75AC-4426-A12C-73C0831FD3F5}" type="datetimeFigureOut">
               <a:rPr lang="he-IL" smtClean="0"/>
-              <a:t>י"ט/סיון/תשפ"ו</a:t>
+              <a:t>כ"ט/סיון/תשפ"ו</a:t>
             </a:fld>
             <a:endParaRPr lang="he-IL"/>
           </a:p>
@@ -469,7 +469,7 @@
           <a:p>
             <a:fld id="{E6FDE148-75AC-4426-A12C-73C0831FD3F5}" type="datetimeFigureOut">
               <a:rPr lang="he-IL" smtClean="0"/>
-              <a:t>י"ט/סיון/תשפ"ו</a:t>
+              <a:t>כ"ט/סיון/תשפ"ו</a:t>
             </a:fld>
             <a:endParaRPr lang="he-IL"/>
           </a:p>
@@ -684,7 +684,7 @@
           <a:p>
             <a:fld id="{E6FDE148-75AC-4426-A12C-73C0831FD3F5}" type="datetimeFigureOut">
               <a:rPr lang="he-IL" smtClean="0"/>
-              <a:t>י"ט/סיון/תשפ"ו</a:t>
+              <a:t>כ"ט/סיון/תשפ"ו</a:t>
             </a:fld>
             <a:endParaRPr lang="he-IL"/>
           </a:p>
@@ -885,7 +885,7 @@
           <a:p>
             <a:fld id="{E6FDE148-75AC-4426-A12C-73C0831FD3F5}" type="datetimeFigureOut">
               <a:rPr lang="he-IL" smtClean="0"/>
-              <a:t>י"ט/סיון/תשפ"ו</a:t>
+              <a:t>כ"ט/סיון/תשפ"ו</a:t>
             </a:fld>
             <a:endParaRPr lang="he-IL"/>
           </a:p>
@@ -1164,7 +1164,7 @@
           <a:p>
             <a:fld id="{E6FDE148-75AC-4426-A12C-73C0831FD3F5}" type="datetimeFigureOut">
               <a:rPr lang="he-IL" smtClean="0"/>
-              <a:t>י"ט/סיון/תשפ"ו</a:t>
+              <a:t>כ"ט/סיון/תשפ"ו</a:t>
             </a:fld>
             <a:endParaRPr lang="he-IL"/>
           </a:p>
@@ -1432,7 +1432,7 @@
           <a:p>
             <a:fld id="{E6FDE148-75AC-4426-A12C-73C0831FD3F5}" type="datetimeFigureOut">
               <a:rPr lang="he-IL" smtClean="0"/>
-              <a:t>י"ט/סיון/תשפ"ו</a:t>
+              <a:t>כ"ט/סיון/תשפ"ו</a:t>
             </a:fld>
             <a:endParaRPr lang="he-IL"/>
           </a:p>
@@ -1848,7 +1848,7 @@
           <a:p>
             <a:fld id="{E6FDE148-75AC-4426-A12C-73C0831FD3F5}" type="datetimeFigureOut">
               <a:rPr lang="he-IL" smtClean="0"/>
-              <a:t>י"ט/סיון/תשפ"ו</a:t>
+              <a:t>כ"ט/סיון/תשפ"ו</a:t>
             </a:fld>
             <a:endParaRPr lang="he-IL"/>
           </a:p>
@@ -1997,7 +1997,7 @@
           <a:p>
             <a:fld id="{E6FDE148-75AC-4426-A12C-73C0831FD3F5}" type="datetimeFigureOut">
               <a:rPr lang="he-IL" smtClean="0"/>
-              <a:t>י"ט/סיון/תשפ"ו</a:t>
+              <a:t>כ"ט/סיון/תשפ"ו</a:t>
             </a:fld>
             <a:endParaRPr lang="he-IL"/>
           </a:p>
@@ -2123,7 +2123,7 @@
           <a:p>
             <a:fld id="{E6FDE148-75AC-4426-A12C-73C0831FD3F5}" type="datetimeFigureOut">
               <a:rPr lang="he-IL" smtClean="0"/>
-              <a:t>י"ט/סיון/תשפ"ו</a:t>
+              <a:t>כ"ט/סיון/תשפ"ו</a:t>
             </a:fld>
             <a:endParaRPr lang="he-IL"/>
           </a:p>
@@ -2374,7 +2374,7 @@
           <a:p>
             <a:fld id="{E6FDE148-75AC-4426-A12C-73C0831FD3F5}" type="datetimeFigureOut">
               <a:rPr lang="he-IL" smtClean="0"/>
-              <a:t>י"ט/סיון/תשפ"ו</a:t>
+              <a:t>כ"ט/סיון/תשפ"ו</a:t>
             </a:fld>
             <a:endParaRPr lang="he-IL"/>
           </a:p>
@@ -2819,7 +2819,7 @@
           <a:p>
             <a:fld id="{E6FDE148-75AC-4426-A12C-73C0831FD3F5}" type="datetimeFigureOut">
               <a:rPr lang="he-IL" smtClean="0"/>
-              <a:t>י"ט/סיון/תשפ"ו</a:t>
+              <a:t>כ"ט/סיון/תשפ"ו</a:t>
             </a:fld>
             <a:endParaRPr lang="he-IL"/>
           </a:p>
@@ -3153,7 +3153,7 @@
           <a:p>
             <a:fld id="{E6FDE148-75AC-4426-A12C-73C0831FD3F5}" type="datetimeFigureOut">
               <a:rPr lang="he-IL" smtClean="0"/>
-              <a:t>י"ט/סיון/תשפ"ו</a:t>
+              <a:t>כ"ט/סיון/תשפ"ו</a:t>
             </a:fld>
             <a:endParaRPr lang="he-IL"/>
           </a:p>
